--- a/aula/Modelagem - Aula/Presentation1.pptx
+++ b/aula/Modelagem - Aula/Presentation1.pptx
@@ -8,6 +8,7 @@
     <p:sldId id="256" r:id="rId2"/>
     <p:sldId id="257" r:id="rId3"/>
     <p:sldId id="258" r:id="rId4"/>
+    <p:sldId id="259" r:id="rId5"/>
   </p:sldIdLst>
   <p:sldSz cx="12192000" cy="6858000"/>
   <p:notesSz cx="6858000" cy="9144000"/>
@@ -106,7 +107,161 @@
       </a:defRPr>
     </a:lvl9pPr>
   </p:defaultTextStyle>
+  <p:extLst>
+    <p:ext uri="{EFAFB233-063F-42B5-8137-9DF3F51BA10A}">
+      <p15:sldGuideLst xmlns:p15="http://schemas.microsoft.com/office/powerpoint/2012/main"/>
+    </p:ext>
+  </p:extLst>
 </p:presentation>
+</file>
+
+<file path=ppt/revisionInfo.xml><?xml version="1.0" encoding="utf-8"?>
+<p1510:revInfo xmlns:a="http://schemas.openxmlformats.org/drawingml/2006/main" xmlns:r="http://schemas.openxmlformats.org/officeDocument/2006/relationships" xmlns:p1510="http://schemas.microsoft.com/office/powerpoint/2015/10/main">
+  <p1510:revLst>
+    <p1510:client id="{97A585ED-75AE-4EA9-83A2-E573505AB745}" v="5" dt="2026-09-15T12:02:34.918"/>
+  </p1510:revLst>
+</p1510:revInfo>
+</file>
+
+<file path=ppt/changesInfos/changesInfo1.xml><?xml version="1.0" encoding="utf-8"?>
+<pc:chgInfo xmlns:a="http://schemas.openxmlformats.org/drawingml/2006/main" xmlns:r="http://schemas.openxmlformats.org/officeDocument/2006/relationships" xmlns:ac="http://schemas.microsoft.com/office/drawing/2013/main/command" xmlns:pc="http://schemas.microsoft.com/office/powerpoint/2013/main/command">
+  <pc:docChgLst>
+    <pc:chgData name="Murillo Álvaro Borges de Sousa" userId="02386067-c46f-46e6-bf61-8f6a774af0e5" providerId="ADAL" clId="{73C3FE35-BF7E-418C-A7F8-FA0AB4F63A6B}"/>
+    <pc:docChg chg="undo custSel addSld modSld">
+      <pc:chgData name="Murillo Álvaro Borges de Sousa" userId="02386067-c46f-46e6-bf61-8f6a774af0e5" providerId="ADAL" clId="{73C3FE35-BF7E-418C-A7F8-FA0AB4F63A6B}" dt="2026-09-15T12:03:11.757" v="77" actId="166"/>
+      <pc:docMkLst>
+        <pc:docMk/>
+      </pc:docMkLst>
+      <pc:sldChg chg="addSp delSp modSp new mod">
+        <pc:chgData name="Murillo Álvaro Borges de Sousa" userId="02386067-c46f-46e6-bf61-8f6a774af0e5" providerId="ADAL" clId="{73C3FE35-BF7E-418C-A7F8-FA0AB4F63A6B}" dt="2026-09-15T12:03:11.757" v="77" actId="166"/>
+        <pc:sldMkLst>
+          <pc:docMk/>
+          <pc:sldMk cId="2634151844" sldId="259"/>
+        </pc:sldMkLst>
+        <pc:spChg chg="add del mod topLvl">
+          <ac:chgData name="Murillo Álvaro Borges de Sousa" userId="02386067-c46f-46e6-bf61-8f6a774af0e5" providerId="ADAL" clId="{73C3FE35-BF7E-418C-A7F8-FA0AB4F63A6B}" dt="2026-09-15T12:02:34.918" v="74" actId="164"/>
+          <ac:spMkLst>
+            <pc:docMk/>
+            <pc:sldMk cId="2634151844" sldId="259"/>
+            <ac:spMk id="6" creationId="{3F878856-0318-E211-330C-FC9E20FB7118}"/>
+          </ac:spMkLst>
+        </pc:spChg>
+        <pc:spChg chg="add mod">
+          <ac:chgData name="Murillo Álvaro Borges de Sousa" userId="02386067-c46f-46e6-bf61-8f6a774af0e5" providerId="ADAL" clId="{73C3FE35-BF7E-418C-A7F8-FA0AB4F63A6B}" dt="2026-09-15T12:02:04.086" v="67" actId="1076"/>
+          <ac:spMkLst>
+            <pc:docMk/>
+            <pc:sldMk cId="2634151844" sldId="259"/>
+            <ac:spMk id="7" creationId="{B32ED82E-346A-C785-371C-5EE676533CE5}"/>
+          </ac:spMkLst>
+        </pc:spChg>
+        <pc:spChg chg="add del mod">
+          <ac:chgData name="Murillo Álvaro Borges de Sousa" userId="02386067-c46f-46e6-bf61-8f6a774af0e5" providerId="ADAL" clId="{73C3FE35-BF7E-418C-A7F8-FA0AB4F63A6B}" dt="2026-09-15T12:00:58.503" v="23" actId="478"/>
+          <ac:spMkLst>
+            <pc:docMk/>
+            <pc:sldMk cId="2634151844" sldId="259"/>
+            <ac:spMk id="8" creationId="{3E9C395A-AADD-414A-6966-C390EA12D52B}"/>
+          </ac:spMkLst>
+        </pc:spChg>
+        <pc:spChg chg="add mod ord">
+          <ac:chgData name="Murillo Álvaro Borges de Sousa" userId="02386067-c46f-46e6-bf61-8f6a774af0e5" providerId="ADAL" clId="{73C3FE35-BF7E-418C-A7F8-FA0AB4F63A6B}" dt="2026-09-15T12:03:05.132" v="76" actId="166"/>
+          <ac:spMkLst>
+            <pc:docMk/>
+            <pc:sldMk cId="2634151844" sldId="259"/>
+            <ac:spMk id="9" creationId="{0609253A-6624-350E-863C-638200CCE54A}"/>
+          </ac:spMkLst>
+        </pc:spChg>
+        <pc:spChg chg="add mod">
+          <ac:chgData name="Murillo Álvaro Borges de Sousa" userId="02386067-c46f-46e6-bf61-8f6a774af0e5" providerId="ADAL" clId="{73C3FE35-BF7E-418C-A7F8-FA0AB4F63A6B}" dt="2026-09-15T12:02:34.918" v="74" actId="164"/>
+          <ac:spMkLst>
+            <pc:docMk/>
+            <pc:sldMk cId="2634151844" sldId="259"/>
+            <ac:spMk id="22" creationId="{BC220756-21B1-27F6-C5D1-868B6CC599D8}"/>
+          </ac:spMkLst>
+        </pc:spChg>
+        <pc:grpChg chg="add del mod">
+          <ac:chgData name="Murillo Álvaro Borges de Sousa" userId="02386067-c46f-46e6-bf61-8f6a774af0e5" providerId="ADAL" clId="{73C3FE35-BF7E-418C-A7F8-FA0AB4F63A6B}" dt="2026-09-15T12:00:00.407" v="4" actId="165"/>
+          <ac:grpSpMkLst>
+            <pc:docMk/>
+            <pc:sldMk cId="2634151844" sldId="259"/>
+            <ac:grpSpMk id="3" creationId="{EED75BF6-F386-A188-CEE1-CE098670469E}"/>
+          </ac:grpSpMkLst>
+        </pc:grpChg>
+        <pc:grpChg chg="add del mod">
+          <ac:chgData name="Murillo Álvaro Borges de Sousa" userId="02386067-c46f-46e6-bf61-8f6a774af0e5" providerId="ADAL" clId="{73C3FE35-BF7E-418C-A7F8-FA0AB4F63A6B}" dt="2026-09-15T12:01:37.732" v="61" actId="165"/>
+          <ac:grpSpMkLst>
+            <pc:docMk/>
+            <pc:sldMk cId="2634151844" sldId="259"/>
+            <ac:grpSpMk id="13" creationId="{2551FF18-758F-E671-F5B4-2F9E89C00282}"/>
+          </ac:grpSpMkLst>
+        </pc:grpChg>
+        <pc:grpChg chg="add mod">
+          <ac:chgData name="Murillo Álvaro Borges de Sousa" userId="02386067-c46f-46e6-bf61-8f6a774af0e5" providerId="ADAL" clId="{73C3FE35-BF7E-418C-A7F8-FA0AB4F63A6B}" dt="2026-09-15T12:02:34.918" v="74" actId="164"/>
+          <ac:grpSpMkLst>
+            <pc:docMk/>
+            <pc:sldMk cId="2634151844" sldId="259"/>
+            <ac:grpSpMk id="23" creationId="{DA05A291-6B3C-8F9B-79CD-63B20762D376}"/>
+          </ac:grpSpMkLst>
+        </pc:grpChg>
+        <pc:picChg chg="add mod">
+          <ac:chgData name="Murillo Álvaro Borges de Sousa" userId="02386067-c46f-46e6-bf61-8f6a774af0e5" providerId="ADAL" clId="{73C3FE35-BF7E-418C-A7F8-FA0AB4F63A6B}" dt="2026-09-15T11:59:51.016" v="1"/>
+          <ac:picMkLst>
+            <pc:docMk/>
+            <pc:sldMk cId="2634151844" sldId="259"/>
+            <ac:picMk id="2" creationId="{B522AC48-FC9B-9B42-371A-CB88295C1815}"/>
+          </ac:picMkLst>
+        </pc:picChg>
+        <pc:picChg chg="mod topLvl modCrop">
+          <ac:chgData name="Murillo Álvaro Borges de Sousa" userId="02386067-c46f-46e6-bf61-8f6a774af0e5" providerId="ADAL" clId="{73C3FE35-BF7E-418C-A7F8-FA0AB4F63A6B}" dt="2026-09-15T12:02:34.918" v="74" actId="164"/>
+          <ac:picMkLst>
+            <pc:docMk/>
+            <pc:sldMk cId="2634151844" sldId="259"/>
+            <ac:picMk id="4" creationId="{6CE7E46D-E5A4-D2C2-578B-B38AF44400C6}"/>
+          </ac:picMkLst>
+        </pc:picChg>
+        <pc:picChg chg="del mod topLvl">
+          <ac:chgData name="Murillo Álvaro Borges de Sousa" userId="02386067-c46f-46e6-bf61-8f6a774af0e5" providerId="ADAL" clId="{73C3FE35-BF7E-418C-A7F8-FA0AB4F63A6B}" dt="2026-09-15T12:00:02.181" v="5" actId="478"/>
+          <ac:picMkLst>
+            <pc:docMk/>
+            <pc:sldMk cId="2634151844" sldId="259"/>
+            <ac:picMk id="5" creationId="{A4BBE1BD-73DE-67A3-A6CE-72818C3E8BF3}"/>
+          </ac:picMkLst>
+        </pc:picChg>
+        <pc:picChg chg="add del">
+          <ac:chgData name="Murillo Álvaro Borges de Sousa" userId="02386067-c46f-46e6-bf61-8f6a774af0e5" providerId="ADAL" clId="{73C3FE35-BF7E-418C-A7F8-FA0AB4F63A6B}" dt="2026-09-15T12:01:34.392" v="60" actId="478"/>
+          <ac:picMkLst>
+            <pc:docMk/>
+            <pc:sldMk cId="2634151844" sldId="259"/>
+            <ac:picMk id="18" creationId="{D38D7DB9-645E-8401-8ACC-5CDD7A96681D}"/>
+          </ac:picMkLst>
+        </pc:picChg>
+        <pc:cxnChg chg="add mod ord">
+          <ac:chgData name="Murillo Álvaro Borges de Sousa" userId="02386067-c46f-46e6-bf61-8f6a774af0e5" providerId="ADAL" clId="{73C3FE35-BF7E-418C-A7F8-FA0AB4F63A6B}" dt="2026-09-15T12:03:11.757" v="77" actId="166"/>
+          <ac:cxnSpMkLst>
+            <pc:docMk/>
+            <pc:sldMk cId="2634151844" sldId="259"/>
+            <ac:cxnSpMk id="10" creationId="{3506B7F5-D83C-A575-7F3F-EBF00BB32A58}"/>
+          </ac:cxnSpMkLst>
+        </pc:cxnChg>
+        <pc:cxnChg chg="del mod">
+          <ac:chgData name="Murillo Álvaro Borges de Sousa" userId="02386067-c46f-46e6-bf61-8f6a774af0e5" providerId="ADAL" clId="{73C3FE35-BF7E-418C-A7F8-FA0AB4F63A6B}" dt="2026-09-15T12:00:59.734" v="24" actId="478"/>
+          <ac:cxnSpMkLst>
+            <pc:docMk/>
+            <pc:sldMk cId="2634151844" sldId="259"/>
+            <ac:cxnSpMk id="11" creationId="{9F1AB66C-8A40-803D-3B11-E344103D308D}"/>
+          </ac:cxnSpMkLst>
+        </pc:cxnChg>
+        <pc:cxnChg chg="add mod ord">
+          <ac:chgData name="Murillo Álvaro Borges de Sousa" userId="02386067-c46f-46e6-bf61-8f6a774af0e5" providerId="ADAL" clId="{73C3FE35-BF7E-418C-A7F8-FA0AB4F63A6B}" dt="2026-09-15T12:03:05.132" v="76" actId="166"/>
+          <ac:cxnSpMkLst>
+            <pc:docMk/>
+            <pc:sldMk cId="2634151844" sldId="259"/>
+            <ac:cxnSpMk id="12" creationId="{1B1E8AB6-143D-CADE-2D9B-0C6BF8961FDA}"/>
+          </ac:cxnSpMkLst>
+        </pc:cxnChg>
+      </pc:sldChg>
+    </pc:docChg>
+  </pc:docChgLst>
+</pc:chgInfo>
 </file>
 
 <file path=ppt/slideLayouts/slideLayout1.xml><?xml version="1.0" encoding="utf-8"?>
@@ -258,7 +413,7 @@
           <a:p>
             <a:fld id="{0D5EC19E-C823-465B-937B-7344AD622D26}" type="datetimeFigureOut">
               <a:rPr lang="pt-BR" smtClean="0"/>
-              <a:t>11/09/2026</a:t>
+              <a:t>15/09/2026</a:t>
             </a:fld>
             <a:endParaRPr lang="pt-BR"/>
           </a:p>
@@ -458,7 +613,7 @@
           <a:p>
             <a:fld id="{0D5EC19E-C823-465B-937B-7344AD622D26}" type="datetimeFigureOut">
               <a:rPr lang="pt-BR" smtClean="0"/>
-              <a:t>11/09/2026</a:t>
+              <a:t>15/09/2026</a:t>
             </a:fld>
             <a:endParaRPr lang="pt-BR"/>
           </a:p>
@@ -668,7 +823,7 @@
           <a:p>
             <a:fld id="{0D5EC19E-C823-465B-937B-7344AD622D26}" type="datetimeFigureOut">
               <a:rPr lang="pt-BR" smtClean="0"/>
-              <a:t>11/09/2026</a:t>
+              <a:t>15/09/2026</a:t>
             </a:fld>
             <a:endParaRPr lang="pt-BR"/>
           </a:p>
@@ -868,7 +1023,7 @@
           <a:p>
             <a:fld id="{0D5EC19E-C823-465B-937B-7344AD622D26}" type="datetimeFigureOut">
               <a:rPr lang="pt-BR" smtClean="0"/>
-              <a:t>11/09/2026</a:t>
+              <a:t>15/09/2026</a:t>
             </a:fld>
             <a:endParaRPr lang="pt-BR"/>
           </a:p>
@@ -1144,7 +1299,7 @@
           <a:p>
             <a:fld id="{0D5EC19E-C823-465B-937B-7344AD622D26}" type="datetimeFigureOut">
               <a:rPr lang="pt-BR" smtClean="0"/>
-              <a:t>11/09/2026</a:t>
+              <a:t>15/09/2026</a:t>
             </a:fld>
             <a:endParaRPr lang="pt-BR"/>
           </a:p>
@@ -1412,7 +1567,7 @@
           <a:p>
             <a:fld id="{0D5EC19E-C823-465B-937B-7344AD622D26}" type="datetimeFigureOut">
               <a:rPr lang="pt-BR" smtClean="0"/>
-              <a:t>11/09/2026</a:t>
+              <a:t>15/09/2026</a:t>
             </a:fld>
             <a:endParaRPr lang="pt-BR"/>
           </a:p>
@@ -1827,7 +1982,7 @@
           <a:p>
             <a:fld id="{0D5EC19E-C823-465B-937B-7344AD622D26}" type="datetimeFigureOut">
               <a:rPr lang="pt-BR" smtClean="0"/>
-              <a:t>11/09/2026</a:t>
+              <a:t>15/09/2026</a:t>
             </a:fld>
             <a:endParaRPr lang="pt-BR"/>
           </a:p>
@@ -1969,7 +2124,7 @@
           <a:p>
             <a:fld id="{0D5EC19E-C823-465B-937B-7344AD622D26}" type="datetimeFigureOut">
               <a:rPr lang="pt-BR" smtClean="0"/>
-              <a:t>11/09/2026</a:t>
+              <a:t>15/09/2026</a:t>
             </a:fld>
             <a:endParaRPr lang="pt-BR"/>
           </a:p>
@@ -2082,7 +2237,7 @@
           <a:p>
             <a:fld id="{0D5EC19E-C823-465B-937B-7344AD622D26}" type="datetimeFigureOut">
               <a:rPr lang="pt-BR" smtClean="0"/>
-              <a:t>11/09/2026</a:t>
+              <a:t>15/09/2026</a:t>
             </a:fld>
             <a:endParaRPr lang="pt-BR"/>
           </a:p>
@@ -2395,7 +2550,7 @@
           <a:p>
             <a:fld id="{0D5EC19E-C823-465B-937B-7344AD622D26}" type="datetimeFigureOut">
               <a:rPr lang="pt-BR" smtClean="0"/>
-              <a:t>11/09/2026</a:t>
+              <a:t>15/09/2026</a:t>
             </a:fld>
             <a:endParaRPr lang="pt-BR"/>
           </a:p>
@@ -2684,7 +2839,7 @@
           <a:p>
             <a:fld id="{0D5EC19E-C823-465B-937B-7344AD622D26}" type="datetimeFigureOut">
               <a:rPr lang="pt-BR" smtClean="0"/>
-              <a:t>11/09/2026</a:t>
+              <a:t>15/09/2026</a:t>
             </a:fld>
             <a:endParaRPr lang="pt-BR"/>
           </a:p>
@@ -2927,7 +3082,7 @@
           <a:p>
             <a:fld id="{0D5EC19E-C823-465B-937B-7344AD622D26}" type="datetimeFigureOut">
               <a:rPr lang="pt-BR" smtClean="0"/>
-              <a:t>11/09/2026</a:t>
+              <a:t>15/09/2026</a:t>
             </a:fld>
             <a:endParaRPr lang="pt-BR"/>
           </a:p>
@@ -3974,6 +4129,390 @@
 </p:sld>
 </file>
 
+<file path=ppt/slides/slide4.xml><?xml version="1.0" encoding="utf-8"?>
+<p:sld xmlns:a="http://schemas.openxmlformats.org/drawingml/2006/main" xmlns:r="http://schemas.openxmlformats.org/officeDocument/2006/relationships" xmlns:p="http://schemas.openxmlformats.org/presentationml/2006/main">
+  <p:cSld>
+    <p:spTree>
+      <p:nvGrpSpPr>
+        <p:cNvPr id="1" name=""/>
+        <p:cNvGrpSpPr/>
+        <p:nvPr/>
+      </p:nvGrpSpPr>
+      <p:grpSpPr>
+        <a:xfrm>
+          <a:off x="0" y="0"/>
+          <a:ext cx="0" cy="0"/>
+          <a:chOff x="0" y="0"/>
+          <a:chExt cx="0" cy="0"/>
+        </a:xfrm>
+      </p:grpSpPr>
+      <p:pic>
+        <p:nvPicPr>
+          <p:cNvPr id="2" name="Picture 1">
+            <a:extLst>
+              <a:ext uri="{FF2B5EF4-FFF2-40B4-BE49-F238E27FC236}">
+                <a16:creationId xmlns:a16="http://schemas.microsoft.com/office/drawing/2014/main" id="{B522AC48-FC9B-9B42-371A-CB88295C1815}"/>
+              </a:ext>
+            </a:extLst>
+          </p:cNvPr>
+          <p:cNvPicPr>
+            <a:picLocks noChangeAspect="1"/>
+          </p:cNvPicPr>
+          <p:nvPr/>
+        </p:nvPicPr>
+        <p:blipFill>
+          <a:blip r:embed="rId2"/>
+          <a:stretch>
+            <a:fillRect/>
+          </a:stretch>
+        </p:blipFill>
+        <p:spPr>
+          <a:xfrm>
+            <a:off x="1448742" y="1057560"/>
+            <a:ext cx="4380167" cy="5345763"/>
+          </a:xfrm>
+          <a:prstGeom prst="rect">
+            <a:avLst/>
+          </a:prstGeom>
+        </p:spPr>
+      </p:pic>
+      <p:sp>
+        <p:nvSpPr>
+          <p:cNvPr id="7" name="TextBox 6">
+            <a:extLst>
+              <a:ext uri="{FF2B5EF4-FFF2-40B4-BE49-F238E27FC236}">
+                <a16:creationId xmlns:a16="http://schemas.microsoft.com/office/drawing/2014/main" id="{B32ED82E-346A-C785-371C-5EE676533CE5}"/>
+              </a:ext>
+            </a:extLst>
+          </p:cNvPr>
+          <p:cNvSpPr txBox="1"/>
+          <p:nvPr/>
+        </p:nvSpPr>
+        <p:spPr>
+          <a:xfrm>
+            <a:off x="7871675" y="5145003"/>
+            <a:ext cx="1776831" cy="923330"/>
+          </a:xfrm>
+          <a:prstGeom prst="rect">
+            <a:avLst/>
+          </a:prstGeom>
+          <a:noFill/>
+        </p:spPr>
+        <p:txBody>
+          <a:bodyPr wrap="square" rtlCol="0">
+            <a:spAutoFit/>
+          </a:bodyPr>
+          <a:lstStyle/>
+          <a:p>
+            <a:pPr algn="ctr"/>
+            <a:r>
+              <a:rPr lang="pt-BR" dirty="0"/>
+              <a:t>Rigidez do mancal assimétrico</a:t>
+            </a:r>
+          </a:p>
+        </p:txBody>
+      </p:sp>
+      <p:grpSp>
+        <p:nvGrpSpPr>
+          <p:cNvPr id="23" name="Group 22">
+            <a:extLst>
+              <a:ext uri="{FF2B5EF4-FFF2-40B4-BE49-F238E27FC236}">
+                <a16:creationId xmlns:a16="http://schemas.microsoft.com/office/drawing/2014/main" id="{DA05A291-6B3C-8F9B-79CD-63B20762D376}"/>
+              </a:ext>
+            </a:extLst>
+          </p:cNvPr>
+          <p:cNvGrpSpPr/>
+          <p:nvPr/>
+        </p:nvGrpSpPr>
+        <p:grpSpPr>
+          <a:xfrm>
+            <a:off x="6920886" y="1712997"/>
+            <a:ext cx="3219312" cy="3139305"/>
+            <a:chOff x="6920886" y="1712997"/>
+            <a:chExt cx="3219312" cy="3139305"/>
+          </a:xfrm>
+        </p:grpSpPr>
+        <p:pic>
+          <p:nvPicPr>
+            <p:cNvPr id="4" name="Picture 3">
+              <a:extLst>
+                <a:ext uri="{FF2B5EF4-FFF2-40B4-BE49-F238E27FC236}">
+                  <a16:creationId xmlns:a16="http://schemas.microsoft.com/office/drawing/2014/main" id="{6CE7E46D-E5A4-D2C2-578B-B38AF44400C6}"/>
+                </a:ext>
+              </a:extLst>
+            </p:cNvPr>
+            <p:cNvPicPr>
+              <a:picLocks noChangeAspect="1"/>
+            </p:cNvPicPr>
+            <p:nvPr/>
+          </p:nvPicPr>
+          <p:blipFill>
+            <a:blip r:embed="rId3"/>
+            <a:srcRect t="1" b="11047"/>
+            <a:stretch>
+              <a:fillRect/>
+            </a:stretch>
+          </p:blipFill>
+          <p:spPr>
+            <a:xfrm>
+              <a:off x="6920886" y="1712997"/>
+              <a:ext cx="3219312" cy="3139305"/>
+            </a:xfrm>
+            <a:prstGeom prst="rect">
+              <a:avLst/>
+            </a:prstGeom>
+          </p:spPr>
+        </p:pic>
+        <p:sp>
+          <p:nvSpPr>
+            <p:cNvPr id="6" name="Oval 5">
+              <a:extLst>
+                <a:ext uri="{FF2B5EF4-FFF2-40B4-BE49-F238E27FC236}">
+                  <a16:creationId xmlns:a16="http://schemas.microsoft.com/office/drawing/2014/main" id="{3F878856-0318-E211-330C-FC9E20FB7118}"/>
+                </a:ext>
+              </a:extLst>
+            </p:cNvPr>
+            <p:cNvSpPr/>
+            <p:nvPr/>
+          </p:nvSpPr>
+          <p:spPr>
+            <a:xfrm>
+              <a:off x="7727675" y="3279900"/>
+              <a:ext cx="144000" cy="144000"/>
+            </a:xfrm>
+            <a:prstGeom prst="ellipse">
+              <a:avLst/>
+            </a:prstGeom>
+            <a:solidFill>
+              <a:srgbClr val="C00000"/>
+            </a:solidFill>
+            <a:ln>
+              <a:solidFill>
+                <a:srgbClr val="C00000"/>
+              </a:solidFill>
+            </a:ln>
+          </p:spPr>
+          <p:style>
+            <a:lnRef idx="2">
+              <a:schemeClr val="accent1">
+                <a:shade val="15000"/>
+              </a:schemeClr>
+            </a:lnRef>
+            <a:fillRef idx="1">
+              <a:schemeClr val="accent1"/>
+            </a:fillRef>
+            <a:effectRef idx="0">
+              <a:schemeClr val="accent1"/>
+            </a:effectRef>
+            <a:fontRef idx="minor">
+              <a:schemeClr val="lt1"/>
+            </a:fontRef>
+          </p:style>
+          <p:txBody>
+            <a:bodyPr rtlCol="0" anchor="ctr"/>
+            <a:lstStyle/>
+            <a:p>
+              <a:pPr algn="ctr"/>
+              <a:endParaRPr lang="pt-BR"/>
+            </a:p>
+          </p:txBody>
+        </p:sp>
+        <p:sp>
+          <p:nvSpPr>
+            <p:cNvPr id="22" name="Rectangle 21">
+              <a:extLst>
+                <a:ext uri="{FF2B5EF4-FFF2-40B4-BE49-F238E27FC236}">
+                  <a16:creationId xmlns:a16="http://schemas.microsoft.com/office/drawing/2014/main" id="{BC220756-21B1-27F6-C5D1-868B6CC599D8}"/>
+                </a:ext>
+              </a:extLst>
+            </p:cNvPr>
+            <p:cNvSpPr/>
+            <p:nvPr/>
+          </p:nvSpPr>
+          <p:spPr>
+            <a:xfrm>
+              <a:off x="9306821" y="4541453"/>
+              <a:ext cx="647407" cy="310849"/>
+            </a:xfrm>
+            <a:prstGeom prst="rect">
+              <a:avLst/>
+            </a:prstGeom>
+            <a:solidFill>
+              <a:schemeClr val="bg1"/>
+            </a:solidFill>
+            <a:ln>
+              <a:solidFill>
+                <a:schemeClr val="bg1"/>
+              </a:solidFill>
+            </a:ln>
+          </p:spPr>
+          <p:style>
+            <a:lnRef idx="2">
+              <a:schemeClr val="accent1">
+                <a:shade val="15000"/>
+              </a:schemeClr>
+            </a:lnRef>
+            <a:fillRef idx="1">
+              <a:schemeClr val="accent1"/>
+            </a:fillRef>
+            <a:effectRef idx="0">
+              <a:schemeClr val="accent1"/>
+            </a:effectRef>
+            <a:fontRef idx="minor">
+              <a:schemeClr val="lt1"/>
+            </a:fontRef>
+          </p:style>
+          <p:txBody>
+            <a:bodyPr rtlCol="0" anchor="ctr"/>
+            <a:lstStyle/>
+            <a:p>
+              <a:pPr algn="ctr"/>
+              <a:endParaRPr lang="pt-BR"/>
+            </a:p>
+          </p:txBody>
+        </p:sp>
+      </p:grpSp>
+      <p:cxnSp>
+        <p:nvCxnSpPr>
+          <p:cNvPr id="12" name="Straight Connector 11">
+            <a:extLst>
+              <a:ext uri="{FF2B5EF4-FFF2-40B4-BE49-F238E27FC236}">
+                <a16:creationId xmlns:a16="http://schemas.microsoft.com/office/drawing/2014/main" id="{1B1E8AB6-143D-CADE-2D9B-0C6BF8961FDA}"/>
+              </a:ext>
+            </a:extLst>
+          </p:cNvPr>
+          <p:cNvCxnSpPr>
+            <a:cxnSpLocks/>
+            <a:stCxn id="9" idx="2"/>
+          </p:cNvCxnSpPr>
+          <p:nvPr/>
+        </p:nvCxnSpPr>
+        <p:spPr>
+          <a:xfrm>
+            <a:off x="7076768" y="2415748"/>
+            <a:ext cx="605222" cy="864152"/>
+          </a:xfrm>
+          <a:prstGeom prst="line">
+            <a:avLst/>
+          </a:prstGeom>
+          <a:ln>
+            <a:solidFill>
+              <a:srgbClr val="C00000"/>
+            </a:solidFill>
+          </a:ln>
+        </p:spPr>
+        <p:style>
+          <a:lnRef idx="2">
+            <a:schemeClr val="accent1"/>
+          </a:lnRef>
+          <a:fillRef idx="0">
+            <a:schemeClr val="accent1"/>
+          </a:fillRef>
+          <a:effectRef idx="1">
+            <a:schemeClr val="accent1"/>
+          </a:effectRef>
+          <a:fontRef idx="minor">
+            <a:schemeClr val="tx1"/>
+          </a:fontRef>
+        </p:style>
+      </p:cxnSp>
+      <p:sp>
+        <p:nvSpPr>
+          <p:cNvPr id="9" name="TextBox 8">
+            <a:extLst>
+              <a:ext uri="{FF2B5EF4-FFF2-40B4-BE49-F238E27FC236}">
+                <a16:creationId xmlns:a16="http://schemas.microsoft.com/office/drawing/2014/main" id="{0609253A-6624-350E-863C-638200CCE54A}"/>
+              </a:ext>
+            </a:extLst>
+          </p:cNvPr>
+          <p:cNvSpPr txBox="1"/>
+          <p:nvPr/>
+        </p:nvSpPr>
+        <p:spPr>
+          <a:xfrm>
+            <a:off x="6327546" y="1492418"/>
+            <a:ext cx="1498443" cy="923330"/>
+          </a:xfrm>
+          <a:prstGeom prst="rect">
+            <a:avLst/>
+          </a:prstGeom>
+          <a:noFill/>
+        </p:spPr>
+        <p:txBody>
+          <a:bodyPr wrap="square" rtlCol="0">
+            <a:spAutoFit/>
+          </a:bodyPr>
+          <a:lstStyle/>
+          <a:p>
+            <a:pPr algn="ctr"/>
+            <a:r>
+              <a:rPr lang="pt-BR" dirty="0">
+                <a:solidFill>
+                  <a:srgbClr val="FF0000"/>
+                </a:solidFill>
+              </a:rPr>
+              <a:t>Massa do Suporte e do Mancal</a:t>
+            </a:r>
+          </a:p>
+        </p:txBody>
+      </p:sp>
+      <p:cxnSp>
+        <p:nvCxnSpPr>
+          <p:cNvPr id="10" name="Straight Connector 9">
+            <a:extLst>
+              <a:ext uri="{FF2B5EF4-FFF2-40B4-BE49-F238E27FC236}">
+                <a16:creationId xmlns:a16="http://schemas.microsoft.com/office/drawing/2014/main" id="{3506B7F5-D83C-A575-7F3F-EBF00BB32A58}"/>
+              </a:ext>
+            </a:extLst>
+          </p:cNvPr>
+          <p:cNvCxnSpPr>
+            <a:cxnSpLocks/>
+            <a:stCxn id="7" idx="0"/>
+          </p:cNvCxnSpPr>
+          <p:nvPr/>
+        </p:nvCxnSpPr>
+        <p:spPr>
+          <a:xfrm flipH="1" flipV="1">
+            <a:off x="8218025" y="4132162"/>
+            <a:ext cx="542066" cy="1012841"/>
+          </a:xfrm>
+          <a:prstGeom prst="line">
+            <a:avLst/>
+          </a:prstGeom>
+          <a:ln>
+            <a:solidFill>
+              <a:schemeClr val="tx1"/>
+            </a:solidFill>
+          </a:ln>
+        </p:spPr>
+        <p:style>
+          <a:lnRef idx="2">
+            <a:schemeClr val="accent1"/>
+          </a:lnRef>
+          <a:fillRef idx="0">
+            <a:schemeClr val="accent1"/>
+          </a:fillRef>
+          <a:effectRef idx="1">
+            <a:schemeClr val="accent1"/>
+          </a:effectRef>
+          <a:fontRef idx="minor">
+            <a:schemeClr val="tx1"/>
+          </a:fontRef>
+        </p:style>
+      </p:cxnSp>
+    </p:spTree>
+    <p:extLst>
+      <p:ext uri="{BB962C8B-B14F-4D97-AF65-F5344CB8AC3E}">
+        <p14:creationId xmlns:p14="http://schemas.microsoft.com/office/powerpoint/2010/main" val="2634151844"/>
+      </p:ext>
+    </p:extLst>
+  </p:cSld>
+  <p:clrMapOvr>
+    <a:masterClrMapping/>
+  </p:clrMapOvr>
+</p:sld>
+</file>
+
 <file path=ppt/theme/theme1.xml><?xml version="1.0" encoding="utf-8"?>
 <a:theme xmlns:a="http://schemas.openxmlformats.org/drawingml/2006/main" name="Office Theme">
   <a:themeElements>

--- a/aula/Modelagem - Aula/Presentation1.pptx
+++ b/aula/Modelagem - Aula/Presentation1.pptx
@@ -9,6 +9,7 @@
     <p:sldId id="257" r:id="rId3"/>
     <p:sldId id="258" r:id="rId4"/>
     <p:sldId id="259" r:id="rId5"/>
+    <p:sldId id="260" r:id="rId6"/>
   </p:sldIdLst>
   <p:sldSz cx="12192000" cy="6858000"/>
   <p:notesSz cx="6858000" cy="9144000"/>
@@ -118,7 +119,7 @@
 <file path=ppt/revisionInfo.xml><?xml version="1.0" encoding="utf-8"?>
 <p1510:revInfo xmlns:a="http://schemas.openxmlformats.org/drawingml/2006/main" xmlns:r="http://schemas.openxmlformats.org/officeDocument/2006/relationships" xmlns:p1510="http://schemas.microsoft.com/office/powerpoint/2015/10/main">
   <p1510:revLst>
-    <p1510:client id="{97A585ED-75AE-4EA9-83A2-E573505AB745}" v="5" dt="2026-09-15T12:02:34.918"/>
+    <p1510:client id="{97A585ED-75AE-4EA9-83A2-E573505AB745}" v="15" dt="2026-09-15T18:02:36.616"/>
   </p1510:revLst>
 </p1510:revInfo>
 </file>
@@ -128,7 +129,7 @@
   <pc:docChgLst>
     <pc:chgData name="Murillo Álvaro Borges de Sousa" userId="02386067-c46f-46e6-bf61-8f6a774af0e5" providerId="ADAL" clId="{73C3FE35-BF7E-418C-A7F8-FA0AB4F63A6B}"/>
     <pc:docChg chg="undo custSel addSld modSld">
-      <pc:chgData name="Murillo Álvaro Borges de Sousa" userId="02386067-c46f-46e6-bf61-8f6a774af0e5" providerId="ADAL" clId="{73C3FE35-BF7E-418C-A7F8-FA0AB4F63A6B}" dt="2026-09-15T12:03:11.757" v="77" actId="166"/>
+      <pc:chgData name="Murillo Álvaro Borges de Sousa" userId="02386067-c46f-46e6-bf61-8f6a774af0e5" providerId="ADAL" clId="{73C3FE35-BF7E-418C-A7F8-FA0AB4F63A6B}" dt="2026-09-15T18:02:48.197" v="273" actId="1076"/>
       <pc:docMkLst>
         <pc:docMk/>
       </pc:docMkLst>
@@ -256,6 +257,197 @@
             <pc:docMk/>
             <pc:sldMk cId="2634151844" sldId="259"/>
             <ac:cxnSpMk id="12" creationId="{1B1E8AB6-143D-CADE-2D9B-0C6BF8961FDA}"/>
+          </ac:cxnSpMkLst>
+        </pc:cxnChg>
+      </pc:sldChg>
+      <pc:sldChg chg="addSp delSp modSp new mod">
+        <pc:chgData name="Murillo Álvaro Borges de Sousa" userId="02386067-c46f-46e6-bf61-8f6a774af0e5" providerId="ADAL" clId="{73C3FE35-BF7E-418C-A7F8-FA0AB4F63A6B}" dt="2026-09-15T18:02:48.197" v="273" actId="1076"/>
+        <pc:sldMkLst>
+          <pc:docMk/>
+          <pc:sldMk cId="3108575704" sldId="260"/>
+        </pc:sldMkLst>
+        <pc:spChg chg="add mod topLvl">
+          <ac:chgData name="Murillo Álvaro Borges de Sousa" userId="02386067-c46f-46e6-bf61-8f6a774af0e5" providerId="ADAL" clId="{73C3FE35-BF7E-418C-A7F8-FA0AB4F63A6B}" dt="2026-09-15T18:01:49.810" v="236" actId="164"/>
+          <ac:spMkLst>
+            <pc:docMk/>
+            <pc:sldMk cId="3108575704" sldId="260"/>
+            <ac:spMk id="2" creationId="{C950D944-929E-824B-7FC4-FC471C48B442}"/>
+          </ac:spMkLst>
+        </pc:spChg>
+        <pc:spChg chg="add mod">
+          <ac:chgData name="Murillo Álvaro Borges de Sousa" userId="02386067-c46f-46e6-bf61-8f6a774af0e5" providerId="ADAL" clId="{73C3FE35-BF7E-418C-A7F8-FA0AB4F63A6B}" dt="2026-09-15T18:01:49.810" v="236" actId="164"/>
+          <ac:spMkLst>
+            <pc:docMk/>
+            <pc:sldMk cId="3108575704" sldId="260"/>
+            <ac:spMk id="19" creationId="{BCFBD897-9899-CD3D-40DC-C7165775515C}"/>
+          </ac:spMkLst>
+        </pc:spChg>
+        <pc:spChg chg="add mod">
+          <ac:chgData name="Murillo Álvaro Borges de Sousa" userId="02386067-c46f-46e6-bf61-8f6a774af0e5" providerId="ADAL" clId="{73C3FE35-BF7E-418C-A7F8-FA0AB4F63A6B}" dt="2026-09-15T18:01:49.810" v="236" actId="164"/>
+          <ac:spMkLst>
+            <pc:docMk/>
+            <pc:sldMk cId="3108575704" sldId="260"/>
+            <ac:spMk id="21" creationId="{C4DD3EB7-ACE9-69B6-A777-C4BC7E8F0FD6}"/>
+          </ac:spMkLst>
+        </pc:spChg>
+        <pc:spChg chg="add mod">
+          <ac:chgData name="Murillo Álvaro Borges de Sousa" userId="02386067-c46f-46e6-bf61-8f6a774af0e5" providerId="ADAL" clId="{73C3FE35-BF7E-418C-A7F8-FA0AB4F63A6B}" dt="2026-09-15T18:01:49.810" v="236" actId="164"/>
+          <ac:spMkLst>
+            <pc:docMk/>
+            <pc:sldMk cId="3108575704" sldId="260"/>
+            <ac:spMk id="22" creationId="{8A6DD2A2-A4F2-FEE6-24CD-D637ED1E4B5B}"/>
+          </ac:spMkLst>
+        </pc:spChg>
+        <pc:spChg chg="add mod">
+          <ac:chgData name="Murillo Álvaro Borges de Sousa" userId="02386067-c46f-46e6-bf61-8f6a774af0e5" providerId="ADAL" clId="{73C3FE35-BF7E-418C-A7F8-FA0AB4F63A6B}" dt="2026-09-15T18:01:49.810" v="236" actId="164"/>
+          <ac:spMkLst>
+            <pc:docMk/>
+            <pc:sldMk cId="3108575704" sldId="260"/>
+            <ac:spMk id="24" creationId="{256AFC02-E34F-8E98-A1B1-55F9CD2F1B40}"/>
+          </ac:spMkLst>
+        </pc:spChg>
+        <pc:spChg chg="add mod">
+          <ac:chgData name="Murillo Álvaro Borges de Sousa" userId="02386067-c46f-46e6-bf61-8f6a774af0e5" providerId="ADAL" clId="{73C3FE35-BF7E-418C-A7F8-FA0AB4F63A6B}" dt="2026-09-15T18:01:49.810" v="236" actId="164"/>
+          <ac:spMkLst>
+            <pc:docMk/>
+            <pc:sldMk cId="3108575704" sldId="260"/>
+            <ac:spMk id="26" creationId="{435E80FB-A5C9-2791-AD16-424E22F128CB}"/>
+          </ac:spMkLst>
+        </pc:spChg>
+        <pc:spChg chg="add mod">
+          <ac:chgData name="Murillo Álvaro Borges de Sousa" userId="02386067-c46f-46e6-bf61-8f6a774af0e5" providerId="ADAL" clId="{73C3FE35-BF7E-418C-A7F8-FA0AB4F63A6B}" dt="2026-09-15T18:01:49.810" v="236" actId="164"/>
+          <ac:spMkLst>
+            <pc:docMk/>
+            <pc:sldMk cId="3108575704" sldId="260"/>
+            <ac:spMk id="30" creationId="{698E447B-0915-5980-FF02-5B3B4CD07BDD}"/>
+          </ac:spMkLst>
+        </pc:spChg>
+        <pc:spChg chg="add mod">
+          <ac:chgData name="Murillo Álvaro Borges de Sousa" userId="02386067-c46f-46e6-bf61-8f6a774af0e5" providerId="ADAL" clId="{73C3FE35-BF7E-418C-A7F8-FA0AB4F63A6B}" dt="2026-09-15T17:57:58.772" v="174" actId="1076"/>
+          <ac:spMkLst>
+            <pc:docMk/>
+            <pc:sldMk cId="3108575704" sldId="260"/>
+            <ac:spMk id="31" creationId="{3975B741-9690-5686-94B6-3AC02825BF4D}"/>
+          </ac:spMkLst>
+        </pc:spChg>
+        <pc:spChg chg="add mod">
+          <ac:chgData name="Murillo Álvaro Borges de Sousa" userId="02386067-c46f-46e6-bf61-8f6a774af0e5" providerId="ADAL" clId="{73C3FE35-BF7E-418C-A7F8-FA0AB4F63A6B}" dt="2026-09-15T18:01:49.810" v="236" actId="164"/>
+          <ac:spMkLst>
+            <pc:docMk/>
+            <pc:sldMk cId="3108575704" sldId="260"/>
+            <ac:spMk id="33" creationId="{AC26CE19-8246-9D2B-EBB7-E1CC42398917}"/>
+          </ac:spMkLst>
+        </pc:spChg>
+        <pc:spChg chg="add mod">
+          <ac:chgData name="Murillo Álvaro Borges de Sousa" userId="02386067-c46f-46e6-bf61-8f6a774af0e5" providerId="ADAL" clId="{73C3FE35-BF7E-418C-A7F8-FA0AB4F63A6B}" dt="2026-09-15T17:59:08.753" v="192" actId="164"/>
+          <ac:spMkLst>
+            <pc:docMk/>
+            <pc:sldMk cId="3108575704" sldId="260"/>
+            <ac:spMk id="34" creationId="{288A871A-15DD-1A38-AE99-A5479D605138}"/>
+          </ac:spMkLst>
+        </pc:spChg>
+        <pc:spChg chg="add mod">
+          <ac:chgData name="Murillo Álvaro Borges de Sousa" userId="02386067-c46f-46e6-bf61-8f6a774af0e5" providerId="ADAL" clId="{73C3FE35-BF7E-418C-A7F8-FA0AB4F63A6B}" dt="2026-09-15T17:59:08.753" v="192" actId="164"/>
+          <ac:spMkLst>
+            <pc:docMk/>
+            <pc:sldMk cId="3108575704" sldId="260"/>
+            <ac:spMk id="36" creationId="{5CCA65D7-8860-5DCF-ABAA-EC12B2BA0285}"/>
+          </ac:spMkLst>
+        </pc:spChg>
+        <pc:spChg chg="add mod">
+          <ac:chgData name="Murillo Álvaro Borges de Sousa" userId="02386067-c46f-46e6-bf61-8f6a774af0e5" providerId="ADAL" clId="{73C3FE35-BF7E-418C-A7F8-FA0AB4F63A6B}" dt="2026-09-15T18:01:49.810" v="236" actId="164"/>
+          <ac:spMkLst>
+            <pc:docMk/>
+            <pc:sldMk cId="3108575704" sldId="260"/>
+            <ac:spMk id="43" creationId="{3BDAFD93-7556-D243-6FBF-09B4ABF6612D}"/>
+          </ac:spMkLst>
+        </pc:spChg>
+        <pc:spChg chg="add mod">
+          <ac:chgData name="Murillo Álvaro Borges de Sousa" userId="02386067-c46f-46e6-bf61-8f6a774af0e5" providerId="ADAL" clId="{73C3FE35-BF7E-418C-A7F8-FA0AB4F63A6B}" dt="2026-09-15T18:01:49.810" v="236" actId="164"/>
+          <ac:spMkLst>
+            <pc:docMk/>
+            <pc:sldMk cId="3108575704" sldId="260"/>
+            <ac:spMk id="45" creationId="{2B27BE0A-CA2F-E7AE-DB7D-598D52B816F9}"/>
+          </ac:spMkLst>
+        </pc:spChg>
+        <pc:spChg chg="add mod">
+          <ac:chgData name="Murillo Álvaro Borges de Sousa" userId="02386067-c46f-46e6-bf61-8f6a774af0e5" providerId="ADAL" clId="{73C3FE35-BF7E-418C-A7F8-FA0AB4F63A6B}" dt="2026-09-15T18:02:48.197" v="273" actId="1076"/>
+          <ac:spMkLst>
+            <pc:docMk/>
+            <pc:sldMk cId="3108575704" sldId="260"/>
+            <ac:spMk id="47" creationId="{85DE5701-0E17-4890-79B0-C561CA96DE0A}"/>
+          </ac:spMkLst>
+        </pc:spChg>
+        <pc:grpChg chg="add del mod">
+          <ac:chgData name="Murillo Álvaro Borges de Sousa" userId="02386067-c46f-46e6-bf61-8f6a774af0e5" providerId="ADAL" clId="{73C3FE35-BF7E-418C-A7F8-FA0AB4F63A6B}" dt="2026-09-15T17:54:38.219" v="128" actId="478"/>
+          <ac:grpSpMkLst>
+            <pc:docMk/>
+            <pc:sldMk cId="3108575704" sldId="260"/>
+            <ac:grpSpMk id="16" creationId="{C101901F-B88D-1C20-6A6E-BBD1CDC3DC29}"/>
+          </ac:grpSpMkLst>
+        </pc:grpChg>
+        <pc:grpChg chg="add mod">
+          <ac:chgData name="Murillo Álvaro Borges de Sousa" userId="02386067-c46f-46e6-bf61-8f6a774af0e5" providerId="ADAL" clId="{73C3FE35-BF7E-418C-A7F8-FA0AB4F63A6B}" dt="2026-09-15T17:59:59.464" v="206" actId="1076"/>
+          <ac:grpSpMkLst>
+            <pc:docMk/>
+            <pc:sldMk cId="3108575704" sldId="260"/>
+            <ac:grpSpMk id="37" creationId="{2772A90D-4A46-517B-D8E6-14805E396FAE}"/>
+          </ac:grpSpMkLst>
+        </pc:grpChg>
+        <pc:grpChg chg="mod">
+          <ac:chgData name="Murillo Álvaro Borges de Sousa" userId="02386067-c46f-46e6-bf61-8f6a774af0e5" providerId="ADAL" clId="{73C3FE35-BF7E-418C-A7F8-FA0AB4F63A6B}" dt="2026-09-15T18:02:25.400" v="237" actId="1076"/>
+          <ac:grpSpMkLst>
+            <pc:docMk/>
+            <pc:sldMk cId="3108575704" sldId="260"/>
+            <ac:grpSpMk id="46" creationId="{9D88822A-FB47-392A-2584-C70D8432AC01}"/>
+          </ac:grpSpMkLst>
+        </pc:grpChg>
+        <pc:cxnChg chg="add mod ord">
+          <ac:chgData name="Murillo Álvaro Borges de Sousa" userId="02386067-c46f-46e6-bf61-8f6a774af0e5" providerId="ADAL" clId="{73C3FE35-BF7E-418C-A7F8-FA0AB4F63A6B}" dt="2026-09-15T17:54:13.595" v="117" actId="1037"/>
+          <ac:cxnSpMkLst>
+            <pc:docMk/>
+            <pc:sldMk cId="3108575704" sldId="260"/>
+            <ac:cxnSpMk id="4" creationId="{F349D16E-80CE-A647-94B4-3CAB3B59A58A}"/>
+          </ac:cxnSpMkLst>
+        </pc:cxnChg>
+        <pc:cxnChg chg="add del mod topLvl">
+          <ac:chgData name="Murillo Álvaro Borges de Sousa" userId="02386067-c46f-46e6-bf61-8f6a774af0e5" providerId="ADAL" clId="{73C3FE35-BF7E-418C-A7F8-FA0AB4F63A6B}" dt="2026-09-15T17:54:38.219" v="128" actId="478"/>
+          <ac:cxnSpMkLst>
+            <pc:docMk/>
+            <pc:sldMk cId="3108575704" sldId="260"/>
+            <ac:cxnSpMk id="9" creationId="{BF025DB5-D2AC-AD1E-1CFB-E14C8FBAC908}"/>
+          </ac:cxnSpMkLst>
+        </pc:cxnChg>
+        <pc:cxnChg chg="add del mod">
+          <ac:chgData name="Murillo Álvaro Borges de Sousa" userId="02386067-c46f-46e6-bf61-8f6a774af0e5" providerId="ADAL" clId="{73C3FE35-BF7E-418C-A7F8-FA0AB4F63A6B}" dt="2026-09-15T17:54:36.442" v="127" actId="478"/>
+          <ac:cxnSpMkLst>
+            <pc:docMk/>
+            <pc:sldMk cId="3108575704" sldId="260"/>
+            <ac:cxnSpMk id="13" creationId="{5E5F8F97-3AC1-E422-DFA3-530913957193}"/>
+          </ac:cxnSpMkLst>
+        </pc:cxnChg>
+        <pc:cxnChg chg="add mod">
+          <ac:chgData name="Murillo Álvaro Borges de Sousa" userId="02386067-c46f-46e6-bf61-8f6a774af0e5" providerId="ADAL" clId="{73C3FE35-BF7E-418C-A7F8-FA0AB4F63A6B}" dt="2026-09-15T17:54:20.864" v="119" actId="14100"/>
+          <ac:cxnSpMkLst>
+            <pc:docMk/>
+            <pc:sldMk cId="3108575704" sldId="260"/>
+            <ac:cxnSpMk id="17" creationId="{76ABAC78-7EBF-11EF-C824-25BF55783823}"/>
+          </ac:cxnSpMkLst>
+        </pc:cxnChg>
+        <pc:cxnChg chg="add del mod">
+          <ac:chgData name="Murillo Álvaro Borges de Sousa" userId="02386067-c46f-46e6-bf61-8f6a774af0e5" providerId="ADAL" clId="{73C3FE35-BF7E-418C-A7F8-FA0AB4F63A6B}" dt="2026-09-15T17:56:14.539" v="153" actId="478"/>
+          <ac:cxnSpMkLst>
+            <pc:docMk/>
+            <pc:sldMk cId="3108575704" sldId="260"/>
+            <ac:cxnSpMk id="28" creationId="{A4789308-9889-E72D-5AFD-1615825362D0}"/>
+          </ac:cxnSpMkLst>
+        </pc:cxnChg>
+        <pc:cxnChg chg="add mod">
+          <ac:chgData name="Murillo Álvaro Borges de Sousa" userId="02386067-c46f-46e6-bf61-8f6a774af0e5" providerId="ADAL" clId="{73C3FE35-BF7E-418C-A7F8-FA0AB4F63A6B}" dt="2026-09-15T18:00:17.217" v="209" actId="208"/>
+          <ac:cxnSpMkLst>
+            <pc:docMk/>
+            <pc:sldMk cId="3108575704" sldId="260"/>
+            <ac:cxnSpMk id="39" creationId="{B0AB0483-FAAE-AC20-10F0-84694A992A26}"/>
           </ac:cxnSpMkLst>
         </pc:cxnChg>
       </pc:sldChg>
@@ -4513,6 +4705,846 @@
 </p:sld>
 </file>
 
+<file path=ppt/slides/slide5.xml><?xml version="1.0" encoding="utf-8"?>
+<p:sld xmlns:a="http://schemas.openxmlformats.org/drawingml/2006/main" xmlns:r="http://schemas.openxmlformats.org/officeDocument/2006/relationships" xmlns:p="http://schemas.openxmlformats.org/presentationml/2006/main">
+  <p:cSld>
+    <p:spTree>
+      <p:nvGrpSpPr>
+        <p:cNvPr id="1" name=""/>
+        <p:cNvGrpSpPr/>
+        <p:nvPr/>
+      </p:nvGrpSpPr>
+      <p:grpSpPr>
+        <a:xfrm>
+          <a:off x="0" y="0"/>
+          <a:ext cx="0" cy="0"/>
+          <a:chOff x="0" y="0"/>
+          <a:chExt cx="0" cy="0"/>
+        </a:xfrm>
+      </p:grpSpPr>
+      <p:grpSp>
+        <p:nvGrpSpPr>
+          <p:cNvPr id="46" name="Group 45">
+            <a:extLst>
+              <a:ext uri="{FF2B5EF4-FFF2-40B4-BE49-F238E27FC236}">
+                <a16:creationId xmlns:a16="http://schemas.microsoft.com/office/drawing/2014/main" id="{9D88822A-FB47-392A-2584-C70D8432AC01}"/>
+              </a:ext>
+            </a:extLst>
+          </p:cNvPr>
+          <p:cNvGrpSpPr/>
+          <p:nvPr/>
+        </p:nvGrpSpPr>
+        <p:grpSpPr>
+          <a:xfrm>
+            <a:off x="3648851" y="1747200"/>
+            <a:ext cx="5303757" cy="4320000"/>
+            <a:chOff x="3674251" y="909000"/>
+            <a:chExt cx="5303757" cy="4320000"/>
+          </a:xfrm>
+        </p:grpSpPr>
+        <p:sp>
+          <p:nvSpPr>
+            <p:cNvPr id="2" name="Oval 1">
+              <a:extLst>
+                <a:ext uri="{FF2B5EF4-FFF2-40B4-BE49-F238E27FC236}">
+                  <a16:creationId xmlns:a16="http://schemas.microsoft.com/office/drawing/2014/main" id="{C950D944-929E-824B-7FC4-FC471C48B442}"/>
+                </a:ext>
+              </a:extLst>
+            </p:cNvPr>
+            <p:cNvSpPr/>
+            <p:nvPr/>
+          </p:nvSpPr>
+          <p:spPr>
+            <a:xfrm>
+              <a:off x="4296000" y="1629000"/>
+              <a:ext cx="3600000" cy="3600000"/>
+            </a:xfrm>
+            <a:prstGeom prst="ellipse">
+              <a:avLst/>
+            </a:prstGeom>
+            <a:solidFill>
+              <a:schemeClr val="bg1">
+                <a:lumMod val="75000"/>
+              </a:schemeClr>
+            </a:solidFill>
+            <a:ln>
+              <a:solidFill>
+                <a:schemeClr val="tx1">
+                  <a:lumMod val="50000"/>
+                  <a:lumOff val="50000"/>
+                </a:schemeClr>
+              </a:solidFill>
+            </a:ln>
+          </p:spPr>
+          <p:style>
+            <a:lnRef idx="2">
+              <a:schemeClr val="accent1">
+                <a:shade val="15000"/>
+              </a:schemeClr>
+            </a:lnRef>
+            <a:fillRef idx="1">
+              <a:schemeClr val="accent1"/>
+            </a:fillRef>
+            <a:effectRef idx="0">
+              <a:schemeClr val="accent1"/>
+            </a:effectRef>
+            <a:fontRef idx="minor">
+              <a:schemeClr val="lt1"/>
+            </a:fontRef>
+          </p:style>
+          <p:txBody>
+            <a:bodyPr rtlCol="0" anchor="ctr"/>
+            <a:lstStyle/>
+            <a:p>
+              <a:pPr algn="ctr"/>
+              <a:endParaRPr lang="pt-BR"/>
+            </a:p>
+          </p:txBody>
+        </p:sp>
+        <p:cxnSp>
+          <p:nvCxnSpPr>
+            <p:cNvPr id="4" name="Straight Arrow Connector 3">
+              <a:extLst>
+                <a:ext uri="{FF2B5EF4-FFF2-40B4-BE49-F238E27FC236}">
+                  <a16:creationId xmlns:a16="http://schemas.microsoft.com/office/drawing/2014/main" id="{F349D16E-80CE-A647-94B4-3CAB3B59A58A}"/>
+                </a:ext>
+              </a:extLst>
+            </p:cNvPr>
+            <p:cNvCxnSpPr>
+              <a:cxnSpLocks/>
+            </p:cNvCxnSpPr>
+            <p:nvPr/>
+          </p:nvCxnSpPr>
+          <p:spPr>
+            <a:xfrm flipH="1" flipV="1">
+              <a:off x="6084425" y="909000"/>
+              <a:ext cx="0" cy="2520000"/>
+            </a:xfrm>
+            <a:prstGeom prst="straightConnector1">
+              <a:avLst/>
+            </a:prstGeom>
+            <a:ln w="38100">
+              <a:solidFill>
+                <a:schemeClr val="tx1"/>
+              </a:solidFill>
+              <a:tailEnd type="triangle"/>
+            </a:ln>
+          </p:spPr>
+          <p:style>
+            <a:lnRef idx="2">
+              <a:schemeClr val="accent1"/>
+            </a:lnRef>
+            <a:fillRef idx="0">
+              <a:schemeClr val="accent1"/>
+            </a:fillRef>
+            <a:effectRef idx="1">
+              <a:schemeClr val="accent1"/>
+            </a:effectRef>
+            <a:fontRef idx="minor">
+              <a:schemeClr val="tx1"/>
+            </a:fontRef>
+          </p:style>
+        </p:cxnSp>
+        <p:cxnSp>
+          <p:nvCxnSpPr>
+            <p:cNvPr id="17" name="Straight Arrow Connector 16">
+              <a:extLst>
+                <a:ext uri="{FF2B5EF4-FFF2-40B4-BE49-F238E27FC236}">
+                  <a16:creationId xmlns:a16="http://schemas.microsoft.com/office/drawing/2014/main" id="{76ABAC78-7EBF-11EF-C824-25BF55783823}"/>
+                </a:ext>
+              </a:extLst>
+            </p:cNvPr>
+            <p:cNvCxnSpPr>
+              <a:cxnSpLocks/>
+            </p:cNvCxnSpPr>
+            <p:nvPr/>
+          </p:nvCxnSpPr>
+          <p:spPr>
+            <a:xfrm>
+              <a:off x="6096000" y="3429000"/>
+              <a:ext cx="2520000" cy="0"/>
+            </a:xfrm>
+            <a:prstGeom prst="straightConnector1">
+              <a:avLst/>
+            </a:prstGeom>
+            <a:ln w="38100">
+              <a:solidFill>
+                <a:schemeClr val="tx1"/>
+              </a:solidFill>
+              <a:tailEnd type="triangle"/>
+            </a:ln>
+          </p:spPr>
+          <p:style>
+            <a:lnRef idx="2">
+              <a:schemeClr val="accent1"/>
+            </a:lnRef>
+            <a:fillRef idx="0">
+              <a:schemeClr val="accent1"/>
+            </a:fillRef>
+            <a:effectRef idx="1">
+              <a:schemeClr val="accent1"/>
+            </a:effectRef>
+            <a:fontRef idx="minor">
+              <a:schemeClr val="tx1"/>
+            </a:fontRef>
+          </p:style>
+        </p:cxnSp>
+        <p:sp>
+          <p:nvSpPr>
+            <p:cNvPr id="19" name="TextBox 18">
+              <a:extLst>
+                <a:ext uri="{FF2B5EF4-FFF2-40B4-BE49-F238E27FC236}">
+                  <a16:creationId xmlns:a16="http://schemas.microsoft.com/office/drawing/2014/main" id="{BCFBD897-9899-CD3D-40DC-C7165775515C}"/>
+                </a:ext>
+              </a:extLst>
+            </p:cNvPr>
+            <p:cNvSpPr txBox="1"/>
+            <p:nvPr/>
+          </p:nvSpPr>
+          <p:spPr>
+            <a:xfrm>
+              <a:off x="6107576" y="909000"/>
+              <a:ext cx="394660" cy="523220"/>
+            </a:xfrm>
+            <a:prstGeom prst="rect">
+              <a:avLst/>
+            </a:prstGeom>
+            <a:noFill/>
+          </p:spPr>
+          <p:txBody>
+            <a:bodyPr wrap="none" rtlCol="0">
+              <a:spAutoFit/>
+            </a:bodyPr>
+            <a:lstStyle/>
+            <a:p>
+              <a:r>
+                <a:rPr lang="pt-BR" sz="2800" b="1" dirty="0"/>
+                <a:t>Y</a:t>
+              </a:r>
+              <a:endParaRPr lang="pt-BR" b="1" dirty="0"/>
+            </a:p>
+          </p:txBody>
+        </p:sp>
+        <p:sp>
+          <p:nvSpPr>
+            <p:cNvPr id="21" name="TextBox 20">
+              <a:extLst>
+                <a:ext uri="{FF2B5EF4-FFF2-40B4-BE49-F238E27FC236}">
+                  <a16:creationId xmlns:a16="http://schemas.microsoft.com/office/drawing/2014/main" id="{C4DD3EB7-ACE9-69B6-A777-C4BC7E8F0FD6}"/>
+                </a:ext>
+              </a:extLst>
+            </p:cNvPr>
+            <p:cNvSpPr txBox="1"/>
+            <p:nvPr/>
+          </p:nvSpPr>
+          <p:spPr>
+            <a:xfrm>
+              <a:off x="8578540" y="3429000"/>
+              <a:ext cx="399468" cy="523220"/>
+            </a:xfrm>
+            <a:prstGeom prst="rect">
+              <a:avLst/>
+            </a:prstGeom>
+            <a:noFill/>
+          </p:spPr>
+          <p:txBody>
+            <a:bodyPr wrap="none" rtlCol="0">
+              <a:spAutoFit/>
+            </a:bodyPr>
+            <a:lstStyle/>
+            <a:p>
+              <a:r>
+                <a:rPr lang="pt-BR" sz="2800" b="1" dirty="0"/>
+                <a:t>X</a:t>
+              </a:r>
+              <a:endParaRPr lang="pt-BR" b="1" dirty="0"/>
+            </a:p>
+          </p:txBody>
+        </p:sp>
+        <p:sp>
+          <p:nvSpPr>
+            <p:cNvPr id="22" name="Oval 21">
+              <a:extLst>
+                <a:ext uri="{FF2B5EF4-FFF2-40B4-BE49-F238E27FC236}">
+                  <a16:creationId xmlns:a16="http://schemas.microsoft.com/office/drawing/2014/main" id="{8A6DD2A2-A4F2-FEE6-24CD-D637ED1E4B5B}"/>
+                </a:ext>
+              </a:extLst>
+            </p:cNvPr>
+            <p:cNvSpPr/>
+            <p:nvPr/>
+          </p:nvSpPr>
+          <p:spPr>
+            <a:xfrm>
+              <a:off x="5902739" y="3249000"/>
+              <a:ext cx="360000" cy="360000"/>
+            </a:xfrm>
+            <a:prstGeom prst="ellipse">
+              <a:avLst/>
+            </a:prstGeom>
+            <a:solidFill>
+              <a:schemeClr val="bg1"/>
+            </a:solidFill>
+            <a:ln>
+              <a:solidFill>
+                <a:schemeClr val="tx1"/>
+              </a:solidFill>
+            </a:ln>
+          </p:spPr>
+          <p:style>
+            <a:lnRef idx="2">
+              <a:schemeClr val="accent1">
+                <a:shade val="15000"/>
+              </a:schemeClr>
+            </a:lnRef>
+            <a:fillRef idx="1">
+              <a:schemeClr val="accent1"/>
+            </a:fillRef>
+            <a:effectRef idx="0">
+              <a:schemeClr val="accent1"/>
+            </a:effectRef>
+            <a:fontRef idx="minor">
+              <a:schemeClr val="lt1"/>
+            </a:fontRef>
+          </p:style>
+          <p:txBody>
+            <a:bodyPr rtlCol="0" anchor="ctr"/>
+            <a:lstStyle/>
+            <a:p>
+              <a:pPr algn="ctr"/>
+              <a:endParaRPr lang="pt-BR"/>
+            </a:p>
+          </p:txBody>
+        </p:sp>
+        <p:sp>
+          <p:nvSpPr>
+            <p:cNvPr id="24" name="Oval 23">
+              <a:extLst>
+                <a:ext uri="{FF2B5EF4-FFF2-40B4-BE49-F238E27FC236}">
+                  <a16:creationId xmlns:a16="http://schemas.microsoft.com/office/drawing/2014/main" id="{256AFC02-E34F-8E98-A1B1-55F9CD2F1B40}"/>
+                </a:ext>
+              </a:extLst>
+            </p:cNvPr>
+            <p:cNvSpPr/>
+            <p:nvPr/>
+          </p:nvSpPr>
+          <p:spPr>
+            <a:xfrm>
+              <a:off x="6037739" y="3384000"/>
+              <a:ext cx="90000" cy="90000"/>
+            </a:xfrm>
+            <a:prstGeom prst="ellipse">
+              <a:avLst/>
+            </a:prstGeom>
+            <a:solidFill>
+              <a:schemeClr val="tx1"/>
+            </a:solidFill>
+            <a:ln>
+              <a:solidFill>
+                <a:schemeClr val="tx1"/>
+              </a:solidFill>
+            </a:ln>
+          </p:spPr>
+          <p:style>
+            <a:lnRef idx="2">
+              <a:schemeClr val="accent1">
+                <a:shade val="15000"/>
+              </a:schemeClr>
+            </a:lnRef>
+            <a:fillRef idx="1">
+              <a:schemeClr val="accent1"/>
+            </a:fillRef>
+            <a:effectRef idx="0">
+              <a:schemeClr val="accent1"/>
+            </a:effectRef>
+            <a:fontRef idx="minor">
+              <a:schemeClr val="lt1"/>
+            </a:fontRef>
+          </p:style>
+          <p:txBody>
+            <a:bodyPr rtlCol="0" anchor="ctr"/>
+            <a:lstStyle/>
+            <a:p>
+              <a:pPr algn="ctr"/>
+              <a:endParaRPr lang="pt-BR"/>
+            </a:p>
+          </p:txBody>
+        </p:sp>
+        <p:sp>
+          <p:nvSpPr>
+            <p:cNvPr id="26" name="TextBox 25">
+              <a:extLst>
+                <a:ext uri="{FF2B5EF4-FFF2-40B4-BE49-F238E27FC236}">
+                  <a16:creationId xmlns:a16="http://schemas.microsoft.com/office/drawing/2014/main" id="{435E80FB-A5C9-2791-AD16-424E22F128CB}"/>
+                </a:ext>
+              </a:extLst>
+            </p:cNvPr>
+            <p:cNvSpPr txBox="1"/>
+            <p:nvPr/>
+          </p:nvSpPr>
+          <p:spPr>
+            <a:xfrm>
+              <a:off x="5496735" y="3474000"/>
+              <a:ext cx="381836" cy="523220"/>
+            </a:xfrm>
+            <a:prstGeom prst="rect">
+              <a:avLst/>
+            </a:prstGeom>
+            <a:noFill/>
+          </p:spPr>
+          <p:txBody>
+            <a:bodyPr wrap="none" rtlCol="0">
+              <a:spAutoFit/>
+            </a:bodyPr>
+            <a:lstStyle/>
+            <a:p>
+              <a:r>
+                <a:rPr lang="pt-BR" sz="2800" b="1" dirty="0"/>
+                <a:t>Z</a:t>
+              </a:r>
+              <a:endParaRPr lang="pt-BR" b="1" dirty="0"/>
+            </a:p>
+          </p:txBody>
+        </p:sp>
+        <p:sp>
+          <p:nvSpPr>
+            <p:cNvPr id="30" name="Arc 29">
+              <a:extLst>
+                <a:ext uri="{FF2B5EF4-FFF2-40B4-BE49-F238E27FC236}">
+                  <a16:creationId xmlns:a16="http://schemas.microsoft.com/office/drawing/2014/main" id="{698E447B-0915-5980-FF02-5B3B4CD07BDD}"/>
+                </a:ext>
+              </a:extLst>
+            </p:cNvPr>
+            <p:cNvSpPr/>
+            <p:nvPr/>
+          </p:nvSpPr>
+          <p:spPr>
+            <a:xfrm rot="16200000">
+              <a:off x="4102739" y="1432220"/>
+              <a:ext cx="3600000" cy="3600000"/>
+            </a:xfrm>
+            <a:prstGeom prst="arc">
+              <a:avLst>
+                <a:gd name="adj1" fmla="val 17492103"/>
+                <a:gd name="adj2" fmla="val 20456526"/>
+              </a:avLst>
+            </a:prstGeom>
+            <a:ln w="28575">
+              <a:solidFill>
+                <a:schemeClr val="tx1"/>
+              </a:solidFill>
+            </a:ln>
+          </p:spPr>
+          <p:style>
+            <a:lnRef idx="2">
+              <a:schemeClr val="accent1"/>
+            </a:lnRef>
+            <a:fillRef idx="0">
+              <a:schemeClr val="accent1"/>
+            </a:fillRef>
+            <a:effectRef idx="1">
+              <a:schemeClr val="accent1"/>
+            </a:effectRef>
+            <a:fontRef idx="minor">
+              <a:schemeClr val="tx1"/>
+            </a:fontRef>
+          </p:style>
+          <p:txBody>
+            <a:bodyPr rtlCol="0" anchor="ctr"/>
+            <a:lstStyle/>
+            <a:p>
+              <a:pPr algn="ctr"/>
+              <a:endParaRPr lang="pt-BR"/>
+            </a:p>
+          </p:txBody>
+        </p:sp>
+        <p:sp>
+          <p:nvSpPr>
+            <p:cNvPr id="31" name="Isosceles Triangle 30">
+              <a:extLst>
+                <a:ext uri="{FF2B5EF4-FFF2-40B4-BE49-F238E27FC236}">
+                  <a16:creationId xmlns:a16="http://schemas.microsoft.com/office/drawing/2014/main" id="{3975B741-9690-5686-94B6-3AC02825BF4D}"/>
+                </a:ext>
+              </a:extLst>
+            </p:cNvPr>
+            <p:cNvSpPr>
+              <a:spLocks noChangeAspect="1"/>
+            </p:cNvSpPr>
+            <p:nvPr/>
+          </p:nvSpPr>
+          <p:spPr>
+            <a:xfrm rot="11987984">
+              <a:off x="4123376" y="2534358"/>
+              <a:ext cx="177232" cy="152786"/>
+            </a:xfrm>
+            <a:prstGeom prst="triangle">
+              <a:avLst/>
+            </a:prstGeom>
+            <a:solidFill>
+              <a:schemeClr val="tx1"/>
+            </a:solidFill>
+            <a:ln>
+              <a:solidFill>
+                <a:schemeClr val="tx1"/>
+              </a:solidFill>
+            </a:ln>
+          </p:spPr>
+          <p:style>
+            <a:lnRef idx="2">
+              <a:schemeClr val="accent1">
+                <a:shade val="15000"/>
+              </a:schemeClr>
+            </a:lnRef>
+            <a:fillRef idx="1">
+              <a:schemeClr val="accent1"/>
+            </a:fillRef>
+            <a:effectRef idx="0">
+              <a:schemeClr val="accent1"/>
+            </a:effectRef>
+            <a:fontRef idx="minor">
+              <a:schemeClr val="lt1"/>
+            </a:fontRef>
+          </p:style>
+          <p:txBody>
+            <a:bodyPr rtlCol="0" anchor="ctr"/>
+            <a:lstStyle/>
+            <a:p>
+              <a:pPr algn="ctr"/>
+              <a:endParaRPr lang="pt-BR"/>
+            </a:p>
+          </p:txBody>
+        </p:sp>
+        <p:sp>
+          <p:nvSpPr>
+            <p:cNvPr id="33" name="TextBox 32">
+              <a:extLst>
+                <a:ext uri="{FF2B5EF4-FFF2-40B4-BE49-F238E27FC236}">
+                  <a16:creationId xmlns:a16="http://schemas.microsoft.com/office/drawing/2014/main" id="{AC26CE19-8246-9D2B-EBB7-E1CC42398917}"/>
+                </a:ext>
+              </a:extLst>
+            </p:cNvPr>
+            <p:cNvSpPr txBox="1"/>
+            <p:nvPr/>
+          </p:nvSpPr>
+          <p:spPr>
+            <a:xfrm>
+              <a:off x="3674251" y="2189426"/>
+              <a:ext cx="452368" cy="523220"/>
+            </a:xfrm>
+            <a:prstGeom prst="rect">
+              <a:avLst/>
+            </a:prstGeom>
+            <a:noFill/>
+          </p:spPr>
+          <p:txBody>
+            <a:bodyPr wrap="none" rtlCol="0">
+              <a:spAutoFit/>
+            </a:bodyPr>
+            <a:lstStyle/>
+            <a:p>
+              <a:r>
+                <a:rPr lang="el-GR" sz="2800" b="1" dirty="0"/>
+                <a:t>Ω</a:t>
+              </a:r>
+              <a:endParaRPr lang="pt-BR" b="1" dirty="0"/>
+            </a:p>
+          </p:txBody>
+        </p:sp>
+        <p:grpSp>
+          <p:nvGrpSpPr>
+            <p:cNvPr id="37" name="Group 36">
+              <a:extLst>
+                <a:ext uri="{FF2B5EF4-FFF2-40B4-BE49-F238E27FC236}">
+                  <a16:creationId xmlns:a16="http://schemas.microsoft.com/office/drawing/2014/main" id="{2772A90D-4A46-517B-D8E6-14805E396FAE}"/>
+                </a:ext>
+              </a:extLst>
+            </p:cNvPr>
+            <p:cNvGrpSpPr/>
+            <p:nvPr/>
+          </p:nvGrpSpPr>
+          <p:grpSpPr>
+            <a:xfrm>
+              <a:off x="7431637" y="1516422"/>
+              <a:ext cx="386225" cy="618717"/>
+              <a:chOff x="7488861" y="1468716"/>
+              <a:chExt cx="386225" cy="618717"/>
+            </a:xfrm>
+          </p:grpSpPr>
+          <p:sp>
+            <p:nvSpPr>
+              <p:cNvPr id="34" name="Rectangle 33">
+                <a:extLst>
+                  <a:ext uri="{FF2B5EF4-FFF2-40B4-BE49-F238E27FC236}">
+                    <a16:creationId xmlns:a16="http://schemas.microsoft.com/office/drawing/2014/main" id="{288A871A-15DD-1A38-AE99-A5479D605138}"/>
+                  </a:ext>
+                </a:extLst>
+              </p:cNvPr>
+              <p:cNvSpPr/>
+              <p:nvPr/>
+            </p:nvSpPr>
+            <p:spPr>
+              <a:xfrm rot="18790647">
+                <a:off x="7446159" y="1964856"/>
+                <a:ext cx="165279" cy="79876"/>
+              </a:xfrm>
+              <a:prstGeom prst="rect">
+                <a:avLst/>
+              </a:prstGeom>
+            </p:spPr>
+            <p:style>
+              <a:lnRef idx="2">
+                <a:schemeClr val="accent1">
+                  <a:shade val="15000"/>
+                </a:schemeClr>
+              </a:lnRef>
+              <a:fillRef idx="1">
+                <a:schemeClr val="accent1"/>
+              </a:fillRef>
+              <a:effectRef idx="0">
+                <a:schemeClr val="accent1"/>
+              </a:effectRef>
+              <a:fontRef idx="minor">
+                <a:schemeClr val="lt1"/>
+              </a:fontRef>
+            </p:style>
+            <p:txBody>
+              <a:bodyPr rtlCol="0" anchor="ctr"/>
+              <a:lstStyle/>
+              <a:p>
+                <a:pPr algn="ctr"/>
+                <a:endParaRPr lang="pt-BR"/>
+              </a:p>
+            </p:txBody>
+          </p:sp>
+          <p:sp>
+            <p:nvSpPr>
+              <p:cNvPr id="36" name="Rectangle 35">
+                <a:extLst>
+                  <a:ext uri="{FF2B5EF4-FFF2-40B4-BE49-F238E27FC236}">
+                    <a16:creationId xmlns:a16="http://schemas.microsoft.com/office/drawing/2014/main" id="{5CCA65D7-8860-5DCF-ABAA-EC12B2BA0285}"/>
+                  </a:ext>
+                </a:extLst>
+              </p:cNvPr>
+              <p:cNvSpPr/>
+              <p:nvPr/>
+            </p:nvSpPr>
+            <p:spPr>
+              <a:xfrm rot="18790647">
+                <a:off x="7481774" y="1648021"/>
+                <a:ext cx="572617" cy="214007"/>
+              </a:xfrm>
+              <a:prstGeom prst="rect">
+                <a:avLst/>
+              </a:prstGeom>
+            </p:spPr>
+            <p:style>
+              <a:lnRef idx="2">
+                <a:schemeClr val="accent1">
+                  <a:shade val="15000"/>
+                </a:schemeClr>
+              </a:lnRef>
+              <a:fillRef idx="1">
+                <a:schemeClr val="accent1"/>
+              </a:fillRef>
+              <a:effectRef idx="0">
+                <a:schemeClr val="accent1"/>
+              </a:effectRef>
+              <a:fontRef idx="minor">
+                <a:schemeClr val="lt1"/>
+              </a:fontRef>
+            </p:style>
+            <p:txBody>
+              <a:bodyPr rtlCol="0" anchor="ctr"/>
+              <a:lstStyle/>
+              <a:p>
+                <a:pPr algn="ctr"/>
+                <a:endParaRPr lang="pt-BR"/>
+              </a:p>
+            </p:txBody>
+          </p:sp>
+        </p:grpSp>
+        <p:cxnSp>
+          <p:nvCxnSpPr>
+            <p:cNvPr id="39" name="Straight Connector 38">
+              <a:extLst>
+                <a:ext uri="{FF2B5EF4-FFF2-40B4-BE49-F238E27FC236}">
+                  <a16:creationId xmlns:a16="http://schemas.microsoft.com/office/drawing/2014/main" id="{B0AB0483-FAAE-AC20-10F0-84694A992A26}"/>
+                </a:ext>
+              </a:extLst>
+            </p:cNvPr>
+            <p:cNvCxnSpPr>
+              <a:cxnSpLocks/>
+              <a:stCxn id="2" idx="7"/>
+              <a:endCxn id="22" idx="7"/>
+            </p:cNvCxnSpPr>
+            <p:nvPr/>
+          </p:nvCxnSpPr>
+          <p:spPr>
+            <a:xfrm flipH="1">
+              <a:off x="6210018" y="2156208"/>
+              <a:ext cx="1158774" cy="1145513"/>
+            </a:xfrm>
+            <a:prstGeom prst="line">
+              <a:avLst/>
+            </a:prstGeom>
+            <a:ln>
+              <a:solidFill>
+                <a:schemeClr val="tx1"/>
+              </a:solidFill>
+              <a:prstDash val="dash"/>
+            </a:ln>
+          </p:spPr>
+          <p:style>
+            <a:lnRef idx="2">
+              <a:schemeClr val="accent1"/>
+            </a:lnRef>
+            <a:fillRef idx="0">
+              <a:schemeClr val="accent1"/>
+            </a:fillRef>
+            <a:effectRef idx="1">
+              <a:schemeClr val="accent1"/>
+            </a:effectRef>
+            <a:fontRef idx="minor">
+              <a:schemeClr val="tx1"/>
+            </a:fontRef>
+          </p:style>
+        </p:cxnSp>
+        <p:sp>
+          <p:nvSpPr>
+            <p:cNvPr id="43" name="Arc 42">
+              <a:extLst>
+                <a:ext uri="{FF2B5EF4-FFF2-40B4-BE49-F238E27FC236}">
+                  <a16:creationId xmlns:a16="http://schemas.microsoft.com/office/drawing/2014/main" id="{3BDAFD93-7556-D243-6FBF-09B4ABF6612D}"/>
+                </a:ext>
+              </a:extLst>
+            </p:cNvPr>
+            <p:cNvSpPr/>
+            <p:nvPr/>
+          </p:nvSpPr>
+          <p:spPr>
+            <a:xfrm>
+              <a:off x="5047139" y="2628394"/>
+              <a:ext cx="1800000" cy="1800000"/>
+            </a:xfrm>
+            <a:prstGeom prst="arc">
+              <a:avLst>
+                <a:gd name="adj1" fmla="val 19009301"/>
+                <a:gd name="adj2" fmla="val 21293013"/>
+              </a:avLst>
+            </a:prstGeom>
+            <a:ln w="28575">
+              <a:solidFill>
+                <a:schemeClr val="tx1"/>
+              </a:solidFill>
+            </a:ln>
+          </p:spPr>
+          <p:style>
+            <a:lnRef idx="2">
+              <a:schemeClr val="accent1"/>
+            </a:lnRef>
+            <a:fillRef idx="0">
+              <a:schemeClr val="accent1"/>
+            </a:fillRef>
+            <a:effectRef idx="1">
+              <a:schemeClr val="accent1"/>
+            </a:effectRef>
+            <a:fontRef idx="minor">
+              <a:schemeClr val="tx1"/>
+            </a:fontRef>
+          </p:style>
+          <p:txBody>
+            <a:bodyPr rtlCol="0" anchor="ctr"/>
+            <a:lstStyle/>
+            <a:p>
+              <a:pPr algn="ctr"/>
+              <a:endParaRPr lang="pt-BR"/>
+            </a:p>
+          </p:txBody>
+        </p:sp>
+        <p:sp>
+          <p:nvSpPr>
+            <p:cNvPr id="45" name="TextBox 44">
+              <a:extLst>
+                <a:ext uri="{FF2B5EF4-FFF2-40B4-BE49-F238E27FC236}">
+                  <a16:creationId xmlns:a16="http://schemas.microsoft.com/office/drawing/2014/main" id="{2B27BE0A-CA2F-E7AE-DB7D-598D52B816F9}"/>
+                </a:ext>
+              </a:extLst>
+            </p:cNvPr>
+            <p:cNvSpPr txBox="1"/>
+            <p:nvPr/>
+          </p:nvSpPr>
+          <p:spPr>
+            <a:xfrm>
+              <a:off x="6814217" y="2825174"/>
+              <a:ext cx="381836" cy="523220"/>
+            </a:xfrm>
+            <a:prstGeom prst="rect">
+              <a:avLst/>
+            </a:prstGeom>
+            <a:noFill/>
+          </p:spPr>
+          <p:txBody>
+            <a:bodyPr wrap="none" rtlCol="0">
+              <a:spAutoFit/>
+            </a:bodyPr>
+            <a:lstStyle/>
+            <a:p>
+              <a:r>
+                <a:rPr lang="el-GR" sz="2800" dirty="0"/>
+                <a:t>θ</a:t>
+              </a:r>
+              <a:endParaRPr lang="pt-BR" dirty="0"/>
+            </a:p>
+          </p:txBody>
+        </p:sp>
+      </p:grpSp>
+      <p:sp>
+        <p:nvSpPr>
+          <p:cNvPr id="47" name="TextBox 46">
+            <a:extLst>
+              <a:ext uri="{FF2B5EF4-FFF2-40B4-BE49-F238E27FC236}">
+                <a16:creationId xmlns:a16="http://schemas.microsoft.com/office/drawing/2014/main" id="{85DE5701-0E17-4890-79B0-C561CA96DE0A}"/>
+              </a:ext>
+            </a:extLst>
+          </p:cNvPr>
+          <p:cNvSpPr txBox="1"/>
+          <p:nvPr/>
+        </p:nvSpPr>
+        <p:spPr>
+          <a:xfrm>
+            <a:off x="4639030" y="1041190"/>
+            <a:ext cx="2913939" cy="584775"/>
+          </a:xfrm>
+          <a:prstGeom prst="rect">
+            <a:avLst/>
+          </a:prstGeom>
+          <a:noFill/>
+        </p:spPr>
+        <p:txBody>
+          <a:bodyPr wrap="none" rtlCol="0">
+            <a:spAutoFit/>
+          </a:bodyPr>
+          <a:lstStyle/>
+          <a:p>
+            <a:r>
+              <a:rPr lang="pt-BR" sz="3200" b="1" dirty="0"/>
+              <a:t>Probe (Sensor)</a:t>
+            </a:r>
+          </a:p>
+        </p:txBody>
+      </p:sp>
+    </p:spTree>
+    <p:extLst>
+      <p:ext uri="{BB962C8B-B14F-4D97-AF65-F5344CB8AC3E}">
+        <p14:creationId xmlns:p14="http://schemas.microsoft.com/office/powerpoint/2010/main" val="3108575704"/>
+      </p:ext>
+    </p:extLst>
+  </p:cSld>
+  <p:clrMapOvr>
+    <a:masterClrMapping/>
+  </p:clrMapOvr>
+</p:sld>
+</file>
+
 <file path=ppt/theme/theme1.xml><?xml version="1.0" encoding="utf-8"?>
 <a:theme xmlns:a="http://schemas.openxmlformats.org/drawingml/2006/main" name="Office Theme">
   <a:themeElements>
